--- a/classes/parte-4-seguridad-de-aplicaciones-web/091-inyeccion-sql-fundamentos/clase-091-presentacion.pptx
+++ b/classes/parte-4-seguridad-de-aplicaciones-web/091-inyeccion-sql-fundamentos/clase-091-presentacion.pptx
@@ -17,6 +17,9 @@
     <p:sldId id="265" r:id="rId16"/>
     <p:sldId id="266" r:id="rId17"/>
     <p:sldId id="267" r:id="rId18"/>
+    <p:sldId id="268" r:id="rId19"/>
+    <p:sldId id="269" r:id="rId20"/>
+    <p:sldId id="270" r:id="rId21"/>
   </p:sldIdLst>
   <p:sldSz cx="9144000" cy="6858000" type="screen4x3"/>
   <p:notesSz cx="6858000" cy="9144000"/>
@@ -3198,7 +3201,7 @@
                   <a:srgbClr val="0B3D2E"/>
                 </a:solidFill>
               </a:rPr>
-              <a:t>⚠️ Errores comunes</a:t>
+              <a:t>✍️ Ejercicios</a:t>
             </a:r>
           </a:p>
         </p:txBody>
@@ -3236,67 +3239,82 @@
                   <a:srgbClr val="22282E"/>
                 </a:solidFill>
               </a:rPr>
-              <a:t>•  "The used SELECT statements have a different number of columns" — Cuenta mal de columnas; ajusta el UNION</a:t>
-            </a:r>
-          </a:p>
-          <a:p>
-            <a:pPr>
-              <a:spcAft>
-                <a:spcPts val="600"/>
-              </a:spcAft>
-            </a:pPr>
-            <a:r>
-              <a:rPr sz="1500">
-                <a:solidFill>
-                  <a:srgbClr val="22282E"/>
-                </a:solidFill>
-              </a:rPr>
-              <a:t>•  No hay error visible — Errores desactivados; pasa a blind (próxima clase)</a:t>
-            </a:r>
-          </a:p>
-          <a:p>
-            <a:pPr>
-              <a:spcAft>
-                <a:spcPts val="600"/>
-              </a:spcAft>
-            </a:pPr>
-            <a:r>
-              <a:rPr sz="1500">
-                <a:solidFill>
-                  <a:srgbClr val="22282E"/>
-                </a:solidFill>
-              </a:rPr>
-              <a:t>•  Comilla escapada — Nivel Medium filtra '; prueba numérico o encoding</a:t>
-            </a:r>
-          </a:p>
-          <a:p>
-            <a:pPr>
-              <a:spcAft>
-                <a:spcPts val="600"/>
-              </a:spcAft>
-            </a:pPr>
-            <a:r>
-              <a:rPr sz="1500">
-                <a:solidFill>
-                  <a:srgbClr val="22282E"/>
-                </a:solidFill>
-              </a:rPr>
-              <a:t>•  UNION devuelve tipos incompatibles — Usa NULL en columnas para igualar tipos</a:t>
-            </a:r>
-          </a:p>
-          <a:p>
-            <a:pPr>
-              <a:spcAft>
-                <a:spcPts val="600"/>
-              </a:spcAft>
-            </a:pPr>
-            <a:r>
-              <a:rPr sz="1500">
-                <a:solidFill>
-                  <a:srgbClr val="22282E"/>
-                </a:solidFill>
-              </a:rPr>
-              <a:t>•  Bypass de login no funciona — Sintaxis de comentario incorrecta para el motor</a:t>
+              <a:t>•  Determina el motor de base de datos por su sintaxis de comentarios y errores.</a:t>
+            </a:r>
+          </a:p>
+          <a:p>
+            <a:pPr>
+              <a:spcAft>
+                <a:spcPts val="600"/>
+              </a:spcAft>
+            </a:pPr>
+            <a:r>
+              <a:rPr sz="1500">
+                <a:solidFill>
+                  <a:srgbClr val="22282E"/>
+                </a:solidFill>
+              </a:rPr>
+              <a:t>•  Extrae el hash de la contraseña de admin y crackéalo (offline, con hashcat) en tu lab.</a:t>
+            </a:r>
+          </a:p>
+          <a:p>
+            <a:pPr>
+              <a:spcAft>
+                <a:spcPts val="600"/>
+              </a:spcAft>
+            </a:pPr>
+            <a:r>
+              <a:rPr sz="1500">
+                <a:solidFill>
+                  <a:srgbClr val="22282E"/>
+                </a:solidFill>
+              </a:rPr>
+              <a:t>•  Consigue el nombre de la base de datos actual con database().</a:t>
+            </a:r>
+          </a:p>
+          <a:p>
+            <a:pPr>
+              <a:spcAft>
+                <a:spcPts val="600"/>
+              </a:spcAft>
+            </a:pPr>
+            <a:r>
+              <a:rPr sz="1500">
+                <a:solidFill>
+                  <a:srgbClr val="22282E"/>
+                </a:solidFill>
+              </a:rPr>
+              <a:t>•  Explica por qué ORDER BY ayuda a contar columnas.</a:t>
+            </a:r>
+          </a:p>
+          <a:p>
+            <a:pPr>
+              <a:spcAft>
+                <a:spcPts val="600"/>
+              </a:spcAft>
+            </a:pPr>
+            <a:r>
+              <a:rPr sz="1500">
+                <a:solidFill>
+                  <a:srgbClr val="22282E"/>
+                </a:solidFill>
+              </a:rPr>
+              <a:t>•  Escribe la versión parametrizada (segura) de la query vulnerable en PHP y en Python.</a:t>
+            </a:r>
+          </a:p>
+          <a:p>
+            <a:pPr>
+              <a:spcAft>
+                <a:spcPts val="600"/>
+              </a:spcAft>
+            </a:pPr>
+            <a:r>
+              <a:rPr sz="1500">
+                <a:solidFill>
+                  <a:srgbClr val="22282E"/>
+                </a:solidFill>
+              </a:rPr>
+              <a:t>•  Diferencia UNION-based de error-based con un ejemplo propio.</a:t>
             </a:r>
           </a:p>
         </p:txBody>
@@ -3347,7 +3365,7 @@
                   <a:srgbClr val="0B3D2E"/>
                 </a:solidFill>
               </a:rPr>
-              <a:t>❓ Preguntas frecuentes</a:t>
+              <a:t>📝 Reto verificable</a:t>
             </a:r>
           </a:p>
         </p:txBody>
@@ -3385,82 +3403,22 @@
                   <a:srgbClr val="22282E"/>
                 </a:solidFill>
               </a:rPr>
-              <a:t>•  ❓ ¿Los ORM me protegen?</a:t>
-            </a:r>
-          </a:p>
-          <a:p>
-            <a:pPr>
-              <a:spcAft>
-                <a:spcPts val="600"/>
-              </a:spcAft>
-            </a:pPr>
-            <a:r>
-              <a:rPr sz="1500">
-                <a:solidFill>
-                  <a:srgbClr val="22282E"/>
-                </a:solidFill>
-              </a:rPr>
-              <a:t>•  En gran medida, si usas sus métodos parametrizados. Pero el SQL crudo dentro de un ORM vuelve a ser vulnerable.</a:t>
-            </a:r>
-          </a:p>
-          <a:p>
-            <a:pPr>
-              <a:spcAft>
-                <a:spcPts val="600"/>
-              </a:spcAft>
-            </a:pPr>
-            <a:r>
-              <a:rPr sz="1500">
-                <a:solidFill>
-                  <a:srgbClr val="22282E"/>
-                </a:solidFill>
-              </a:rPr>
-              <a:t>•  ❓ ¿Escapar comillas es suficiente?</a:t>
-            </a:r>
-          </a:p>
-          <a:p>
-            <a:pPr>
-              <a:spcAft>
-                <a:spcPts val="600"/>
-              </a:spcAft>
-            </a:pPr>
-            <a:r>
-              <a:rPr sz="1500">
-                <a:solidFill>
-                  <a:srgbClr val="22282E"/>
-                </a:solidFill>
-              </a:rPr>
-              <a:t>•  No de forma fiable. La defensa correcta son las consultas parametrizadas; el escaping manual es propenso a errores.</a:t>
-            </a:r>
-          </a:p>
-          <a:p>
-            <a:pPr>
-              <a:spcAft>
-                <a:spcPts val="600"/>
-              </a:spcAft>
-            </a:pPr>
-            <a:r>
-              <a:rPr sz="1500">
-                <a:solidFill>
-                  <a:srgbClr val="22282E"/>
-                </a:solidFill>
-              </a:rPr>
-              <a:t>•  ❓ ¿Por qué informationschema es tan útil?</a:t>
-            </a:r>
-          </a:p>
-          <a:p>
-            <a:pPr>
-              <a:spcAft>
-                <a:spcPts val="600"/>
-              </a:spcAft>
-            </a:pPr>
-            <a:r>
-              <a:rPr sz="1500">
-                <a:solidFill>
-                  <a:srgbClr val="22282E"/>
-                </a:solidFill>
-              </a:rPr>
-              <a:t>•  Es el catálogo estándar que describe tablas y columnas; permite mapear la base de datos sin conocerla de antemano.</a:t>
+              <a:t>•  Extrae todos los usuarios y hashes de la tabla users de DVWA vía UNION SQLi y luego reescribe la consulta backend de forma segura.</a:t>
+            </a:r>
+          </a:p>
+          <a:p>
+            <a:pPr>
+              <a:spcAft>
+                <a:spcPts val="600"/>
+              </a:spcAft>
+            </a:pPr>
+            <a:r>
+              <a:rPr sz="1500">
+                <a:solidFill>
+                  <a:srgbClr val="22282E"/>
+                </a:solidFill>
+              </a:rPr>
+              <a:t>•  Criterio de aceptación: entregas el listado exfiltrado (evidencia), el payload UNION usado y el código corregido con prepared statements que impide la inyección.</a:t>
             </a:r>
           </a:p>
         </p:txBody>
@@ -3511,7 +3469,7 @@
                   <a:srgbClr val="0B3D2E"/>
                 </a:solidFill>
               </a:rPr>
-              <a:t>🔗 Referencias</a:t>
+              <a:t>⚠️ Errores comunes</a:t>
             </a:r>
           </a:p>
         </p:txBody>
@@ -3549,6 +3507,319 @@
                   <a:srgbClr val="22282E"/>
                 </a:solidFill>
               </a:rPr>
+              <a:t>•  "The used SELECT statements have a different number of columns" — Cuenta mal de columnas; ajusta el UNION</a:t>
+            </a:r>
+          </a:p>
+          <a:p>
+            <a:pPr>
+              <a:spcAft>
+                <a:spcPts val="600"/>
+              </a:spcAft>
+            </a:pPr>
+            <a:r>
+              <a:rPr sz="1500">
+                <a:solidFill>
+                  <a:srgbClr val="22282E"/>
+                </a:solidFill>
+              </a:rPr>
+              <a:t>•  No hay error visible — Errores desactivados; pasa a blind (próxima clase)</a:t>
+            </a:r>
+          </a:p>
+          <a:p>
+            <a:pPr>
+              <a:spcAft>
+                <a:spcPts val="600"/>
+              </a:spcAft>
+            </a:pPr>
+            <a:r>
+              <a:rPr sz="1500">
+                <a:solidFill>
+                  <a:srgbClr val="22282E"/>
+                </a:solidFill>
+              </a:rPr>
+              <a:t>•  Comilla escapada — Nivel Medium filtra '; prueba numérico o encoding</a:t>
+            </a:r>
+          </a:p>
+          <a:p>
+            <a:pPr>
+              <a:spcAft>
+                <a:spcPts val="600"/>
+              </a:spcAft>
+            </a:pPr>
+            <a:r>
+              <a:rPr sz="1500">
+                <a:solidFill>
+                  <a:srgbClr val="22282E"/>
+                </a:solidFill>
+              </a:rPr>
+              <a:t>•  UNION devuelve tipos incompatibles — Usa NULL en columnas para igualar tipos</a:t>
+            </a:r>
+          </a:p>
+          <a:p>
+            <a:pPr>
+              <a:spcAft>
+                <a:spcPts val="600"/>
+              </a:spcAft>
+            </a:pPr>
+            <a:r>
+              <a:rPr sz="1500">
+                <a:solidFill>
+                  <a:srgbClr val="22282E"/>
+                </a:solidFill>
+              </a:rPr>
+              <a:t>•  Bypass de login no funciona — Sintaxis de comentario incorrecta para el motor</a:t>
+            </a:r>
+          </a:p>
+        </p:txBody>
+      </p:sp>
+    </p:spTree>
+  </p:cSld>
+  <p:clrMapOvr>
+    <a:masterClrMapping/>
+  </p:clrMapOvr>
+</p:sld>
+</file>
+
+<file path=ppt/slides/slide13.xml><?xml version="1.0" encoding="utf-8"?>
+<p:sld xmlns:a="http://schemas.openxmlformats.org/drawingml/2006/main" xmlns:p="http://schemas.openxmlformats.org/presentationml/2006/main" xmlns:r="http://schemas.openxmlformats.org/officeDocument/2006/relationships">
+  <p:cSld>
+    <p:spTree>
+      <p:nvGrpSpPr>
+        <p:cNvPr id="1" name=""/>
+        <p:cNvGrpSpPr/>
+        <p:nvPr/>
+      </p:nvGrpSpPr>
+      <p:grpSpPr/>
+      <p:sp>
+        <p:nvSpPr>
+          <p:cNvPr id="2" name="TextBox 1"/>
+          <p:cNvSpPr txBox="1"/>
+          <p:nvPr/>
+        </p:nvSpPr>
+        <p:spPr>
+          <a:xfrm>
+            <a:off x="457200" y="320040"/>
+            <a:ext cx="8229600" cy="822960"/>
+          </a:xfrm>
+          <a:prstGeom prst="rect">
+            <a:avLst/>
+          </a:prstGeom>
+          <a:noFill/>
+        </p:spPr>
+        <p:txBody>
+          <a:bodyPr wrap="square">
+            <a:spAutoFit/>
+          </a:bodyPr>
+          <a:lstStyle/>
+          <a:p>
+            <a:r>
+              <a:rPr sz="2600" b="1">
+                <a:solidFill>
+                  <a:srgbClr val="0B3D2E"/>
+                </a:solidFill>
+              </a:rPr>
+              <a:t>❓ Preguntas frecuentes</a:t>
+            </a:r>
+          </a:p>
+        </p:txBody>
+      </p:sp>
+      <p:sp>
+        <p:nvSpPr>
+          <p:cNvPr id="3" name="TextBox 2"/>
+          <p:cNvSpPr txBox="1"/>
+          <p:nvPr/>
+        </p:nvSpPr>
+        <p:spPr>
+          <a:xfrm>
+            <a:off x="457200" y="1280160"/>
+            <a:ext cx="8229600" cy="4937760"/>
+          </a:xfrm>
+          <a:prstGeom prst="rect">
+            <a:avLst/>
+          </a:prstGeom>
+          <a:noFill/>
+        </p:spPr>
+        <p:txBody>
+          <a:bodyPr wrap="square">
+            <a:spAutoFit/>
+          </a:bodyPr>
+          <a:lstStyle/>
+          <a:p>
+            <a:pPr>
+              <a:spcAft>
+                <a:spcPts val="600"/>
+              </a:spcAft>
+            </a:pPr>
+            <a:r>
+              <a:rPr sz="1500">
+                <a:solidFill>
+                  <a:srgbClr val="22282E"/>
+                </a:solidFill>
+              </a:rPr>
+              <a:t>•  ❓ ¿Los ORM me protegen?</a:t>
+            </a:r>
+          </a:p>
+          <a:p>
+            <a:pPr>
+              <a:spcAft>
+                <a:spcPts val="600"/>
+              </a:spcAft>
+            </a:pPr>
+            <a:r>
+              <a:rPr sz="1500">
+                <a:solidFill>
+                  <a:srgbClr val="22282E"/>
+                </a:solidFill>
+              </a:rPr>
+              <a:t>•  En gran medida, si usas sus métodos parametrizados. Pero el SQL crudo dentro de un ORM vuelve a ser vulnerable.</a:t>
+            </a:r>
+          </a:p>
+          <a:p>
+            <a:pPr>
+              <a:spcAft>
+                <a:spcPts val="600"/>
+              </a:spcAft>
+            </a:pPr>
+            <a:r>
+              <a:rPr sz="1500">
+                <a:solidFill>
+                  <a:srgbClr val="22282E"/>
+                </a:solidFill>
+              </a:rPr>
+              <a:t>•  ❓ ¿Escapar comillas es suficiente?</a:t>
+            </a:r>
+          </a:p>
+          <a:p>
+            <a:pPr>
+              <a:spcAft>
+                <a:spcPts val="600"/>
+              </a:spcAft>
+            </a:pPr>
+            <a:r>
+              <a:rPr sz="1500">
+                <a:solidFill>
+                  <a:srgbClr val="22282E"/>
+                </a:solidFill>
+              </a:rPr>
+              <a:t>•  No de forma fiable. La defensa correcta son las consultas parametrizadas; el escaping manual es propenso a errores.</a:t>
+            </a:r>
+          </a:p>
+          <a:p>
+            <a:pPr>
+              <a:spcAft>
+                <a:spcPts val="600"/>
+              </a:spcAft>
+            </a:pPr>
+            <a:r>
+              <a:rPr sz="1500">
+                <a:solidFill>
+                  <a:srgbClr val="22282E"/>
+                </a:solidFill>
+              </a:rPr>
+              <a:t>•  ❓ ¿Por qué informationschema es tan útil?</a:t>
+            </a:r>
+          </a:p>
+          <a:p>
+            <a:pPr>
+              <a:spcAft>
+                <a:spcPts val="600"/>
+              </a:spcAft>
+            </a:pPr>
+            <a:r>
+              <a:rPr sz="1500">
+                <a:solidFill>
+                  <a:srgbClr val="22282E"/>
+                </a:solidFill>
+              </a:rPr>
+              <a:t>•  Es el catálogo estándar que describe tablas y columnas; permite mapear la base de datos sin conocerla de antemano.</a:t>
+            </a:r>
+          </a:p>
+        </p:txBody>
+      </p:sp>
+    </p:spTree>
+  </p:cSld>
+  <p:clrMapOvr>
+    <a:masterClrMapping/>
+  </p:clrMapOvr>
+</p:sld>
+</file>
+
+<file path=ppt/slides/slide14.xml><?xml version="1.0" encoding="utf-8"?>
+<p:sld xmlns:a="http://schemas.openxmlformats.org/drawingml/2006/main" xmlns:p="http://schemas.openxmlformats.org/presentationml/2006/main" xmlns:r="http://schemas.openxmlformats.org/officeDocument/2006/relationships">
+  <p:cSld>
+    <p:spTree>
+      <p:nvGrpSpPr>
+        <p:cNvPr id="1" name=""/>
+        <p:cNvGrpSpPr/>
+        <p:nvPr/>
+      </p:nvGrpSpPr>
+      <p:grpSpPr/>
+      <p:sp>
+        <p:nvSpPr>
+          <p:cNvPr id="2" name="TextBox 1"/>
+          <p:cNvSpPr txBox="1"/>
+          <p:nvPr/>
+        </p:nvSpPr>
+        <p:spPr>
+          <a:xfrm>
+            <a:off x="457200" y="320040"/>
+            <a:ext cx="8229600" cy="822960"/>
+          </a:xfrm>
+          <a:prstGeom prst="rect">
+            <a:avLst/>
+          </a:prstGeom>
+          <a:noFill/>
+        </p:spPr>
+        <p:txBody>
+          <a:bodyPr wrap="square">
+            <a:spAutoFit/>
+          </a:bodyPr>
+          <a:lstStyle/>
+          <a:p>
+            <a:r>
+              <a:rPr sz="2600" b="1">
+                <a:solidFill>
+                  <a:srgbClr val="0B3D2E"/>
+                </a:solidFill>
+              </a:rPr>
+              <a:t>🔗 Referencias</a:t>
+            </a:r>
+          </a:p>
+        </p:txBody>
+      </p:sp>
+      <p:sp>
+        <p:nvSpPr>
+          <p:cNvPr id="3" name="TextBox 2"/>
+          <p:cNvSpPr txBox="1"/>
+          <p:nvPr/>
+        </p:nvSpPr>
+        <p:spPr>
+          <a:xfrm>
+            <a:off x="457200" y="1280160"/>
+            <a:ext cx="8229600" cy="4937760"/>
+          </a:xfrm>
+          <a:prstGeom prst="rect">
+            <a:avLst/>
+          </a:prstGeom>
+          <a:noFill/>
+        </p:spPr>
+        <p:txBody>
+          <a:bodyPr wrap="square">
+            <a:spAutoFit/>
+          </a:bodyPr>
+          <a:lstStyle/>
+          <a:p>
+            <a:pPr>
+              <a:spcAft>
+                <a:spcPts val="600"/>
+              </a:spcAft>
+            </a:pPr>
+            <a:r>
+              <a:rPr sz="1500">
+                <a:solidFill>
+                  <a:srgbClr val="22282E"/>
+                </a:solidFill>
+              </a:rPr>
               <a:t>•  Stuttard &amp; Pinto, The Web Application Hacker's Handbook, cap. 9 (Injecting into the DB).</a:t>
             </a:r>
           </a:p>
@@ -3599,6 +3870,81 @@
           </a:p>
         </p:txBody>
       </p:sp>
+    </p:spTree>
+  </p:cSld>
+  <p:clrMapOvr>
+    <a:masterClrMapping/>
+  </p:clrMapOvr>
+</p:sld>
+</file>
+
+<file path=ppt/slides/slide15.xml><?xml version="1.0" encoding="utf-8"?>
+<p:sld xmlns:a="http://schemas.openxmlformats.org/drawingml/2006/main" xmlns:p="http://schemas.openxmlformats.org/presentationml/2006/main" xmlns:r="http://schemas.openxmlformats.org/officeDocument/2006/relationships">
+  <p:cSld>
+    <p:spTree>
+      <p:nvGrpSpPr>
+        <p:cNvPr id="1" name=""/>
+        <p:cNvGrpSpPr/>
+        <p:nvPr/>
+      </p:nvGrpSpPr>
+      <p:grpSpPr/>
+      <p:sp>
+        <p:nvSpPr>
+          <p:cNvPr id="2" name="TextBox 1"/>
+          <p:cNvSpPr txBox="1"/>
+          <p:nvPr/>
+        </p:nvSpPr>
+        <p:spPr>
+          <a:xfrm>
+            <a:off x="457200" y="274320"/>
+            <a:ext cx="8229600" cy="640080"/>
+          </a:xfrm>
+          <a:prstGeom prst="rect">
+            <a:avLst/>
+          </a:prstGeom>
+          <a:noFill/>
+        </p:spPr>
+        <p:txBody>
+          <a:bodyPr wrap="square">
+            <a:spAutoFit/>
+          </a:bodyPr>
+          <a:lstStyle/>
+          <a:p>
+            <a:r>
+              <a:rPr sz="2200" b="1">
+                <a:solidFill>
+                  <a:srgbClr val="0B3D2E"/>
+                </a:solidFill>
+              </a:rPr>
+              <a:t>Diagrama de la clase</a:t>
+            </a:r>
+          </a:p>
+        </p:txBody>
+      </p:sp>
+      <p:pic>
+        <p:nvPicPr>
+          <p:cNvPr id="3" name="Picture 2" descr="4560c7b1e343e6a7.png"/>
+          <p:cNvPicPr>
+            <a:picLocks noChangeAspect="1"/>
+          </p:cNvPicPr>
+          <p:nvPr/>
+        </p:nvPicPr>
+        <p:blipFill>
+          <a:blip r:embed="rId2"/>
+          <a:stretch>
+            <a:fillRect/>
+          </a:stretch>
+        </p:blipFill>
+        <p:spPr>
+          <a:xfrm>
+            <a:off x="457200" y="2724912"/>
+            <a:ext cx="8229600" cy="2048256"/>
+          </a:xfrm>
+          <a:prstGeom prst="rect">
+            <a:avLst/>
+          </a:prstGeom>
+        </p:spPr>
+      </p:pic>
     </p:spTree>
   </p:cSld>
   <p:clrMapOvr>
@@ -3683,7 +4029,7 @@
                   <a:srgbClr val="22282E"/>
                 </a:solidFill>
               </a:rPr>
-              <a:t>•  Comprender a fondo la inyección SQL (SQLi): por qué ocurre, cómo detectarla y cómo explotarla en su forma clásica (in-band). Es la vulnerabilidad emblema de la categoría A03 Injection y una de las de mayor impacto: puede exponer bases de datos completas.</a:t>
+              <a:t>•  Comprender a fondo la inyección SQL (SQLi): por qué ocurre, cómo detectarla y cómo explotarla en su forma clásica (in-band). Es la vulnerabilidad emblema de la categoría A03 Injection y una de las de…</a:t>
             </a:r>
           </a:p>
         </p:txBody>
@@ -4077,7 +4423,7 @@
                   <a:srgbClr val="0B3D2E"/>
                 </a:solidFill>
               </a:rPr>
-              <a:t>📖 Definiciones y características</a:t>
+              <a:t>🧠 Explicación en profundidad</a:t>
             </a:r>
           </a:p>
         </p:txBody>
@@ -4115,82 +4461,97 @@
                   <a:srgbClr val="22282E"/>
                 </a:solidFill>
               </a:rPr>
-              <a:t>•  Inyección SQL: inserción de sintaxis SQL en una entrada que se concatena a una consulta. Característica: rompe la separación entre datos y código.</a:t>
-            </a:r>
-          </a:p>
-          <a:p>
-            <a:pPr>
-              <a:spcAft>
-                <a:spcPts val="600"/>
-              </a:spcAft>
-            </a:pPr>
-            <a:r>
-              <a:rPr sz="1500">
-                <a:solidFill>
-                  <a:srgbClr val="22282E"/>
-                </a:solidFill>
-              </a:rPr>
-              <a:t>•  In-band SQLi: los resultados vuelven por el mismo canal (la respuesta). Característica: la variante más fácil de explotar.</a:t>
-            </a:r>
-          </a:p>
-          <a:p>
-            <a:pPr>
-              <a:spcAft>
-                <a:spcPts val="600"/>
-              </a:spcAft>
-            </a:pPr>
-            <a:r>
-              <a:rPr sz="1500">
-                <a:solidFill>
-                  <a:srgbClr val="22282E"/>
-                </a:solidFill>
-              </a:rPr>
-              <a:t>•  UNION-based: usa UNION SELECT para añadir filas controladas. Característica: requiere igualar número y tipo de columnas.</a:t>
-            </a:r>
-          </a:p>
-          <a:p>
-            <a:pPr>
-              <a:spcAft>
-                <a:spcPts val="600"/>
-              </a:spcAft>
-            </a:pPr>
-            <a:r>
-              <a:rPr sz="1500">
-                <a:solidFill>
-                  <a:srgbClr val="22282E"/>
-                </a:solidFill>
-              </a:rPr>
-              <a:t>•  Error-based: fuerza mensajes de error que filtran datos. Característica: depende de que la app muestre errores.</a:t>
-            </a:r>
-          </a:p>
-          <a:p>
-            <a:pPr>
-              <a:spcAft>
-                <a:spcPts val="600"/>
-              </a:spcAft>
-            </a:pPr>
-            <a:r>
-              <a:rPr sz="1500">
-                <a:solidFill>
-                  <a:srgbClr val="22282E"/>
-                </a:solidFill>
-              </a:rPr>
-              <a:t>•  Prepared statement: consulta con parámetros ligados. Característica: separa código de datos y elimina la SQLi.</a:t>
-            </a:r>
-          </a:p>
-          <a:p>
-            <a:pPr>
-              <a:spcAft>
-                <a:spcPts val="600"/>
-              </a:spcAft>
-            </a:pPr>
-            <a:r>
-              <a:rPr sz="1500">
-                <a:solidFill>
-                  <a:srgbClr val="22282E"/>
-                </a:solidFill>
-              </a:rPr>
-              <a:t>•  Comentario SQL (--, #, / /): trunca el resto de la query. Característica: clave para bypass de login.</a:t>
+              <a:t>•  La inyección SQL nace de un error conceptual que, entendido una vez, explica todas sus</a:t>
+            </a:r>
+          </a:p>
+          <a:p>
+            <a:pPr>
+              <a:spcAft>
+                <a:spcPts val="600"/>
+              </a:spcAft>
+            </a:pPr>
+            <a:r>
+              <a:rPr sz="1500">
+                <a:solidFill>
+                  <a:srgbClr val="22282E"/>
+                </a:solidFill>
+              </a:rPr>
+              <a:t>•  variantes: construir una consulta concatenando la entrada del usuario con el texto de la</a:t>
+            </a:r>
+          </a:p>
+          <a:p>
+            <a:pPr>
+              <a:spcAft>
+                <a:spcPts val="600"/>
+              </a:spcAft>
+            </a:pPr>
+            <a:r>
+              <a:rPr sz="1500">
+                <a:solidFill>
+                  <a:srgbClr val="22282E"/>
+                </a:solidFill>
+              </a:rPr>
+              <a:t>•  consulta. Cuando el código hace algo como "SELECT  FROM users WHERE name = '" + entrada +</a:t>
+            </a:r>
+          </a:p>
+          <a:p>
+            <a:pPr>
+              <a:spcAft>
+                <a:spcPts val="600"/>
+              </a:spcAft>
+            </a:pPr>
+            <a:r>
+              <a:rPr sz="1500">
+                <a:solidFill>
+                  <a:srgbClr val="22282E"/>
+                </a:solidFill>
+              </a:rPr>
+              <a:t>•  "'", la base de datos recibe una única cadena en la que no distingue qué parte era código</a:t>
+            </a:r>
+          </a:p>
+          <a:p>
+            <a:pPr>
+              <a:spcAft>
+                <a:spcPts val="600"/>
+              </a:spcAft>
+            </a:pPr>
+            <a:r>
+              <a:rPr sz="1500">
+                <a:solidFill>
+                  <a:srgbClr val="22282E"/>
+                </a:solidFill>
+              </a:rPr>
+              <a:t>•  que escribió el programador y qué parte era dato que puso el usuario. Si el usuario introduce</a:t>
+            </a:r>
+          </a:p>
+          <a:p>
+            <a:pPr>
+              <a:spcAft>
+                <a:spcPts val="600"/>
+              </a:spcAft>
+            </a:pPr>
+            <a:r>
+              <a:rPr sz="1500">
+                <a:solidFill>
+                  <a:srgbClr val="22282E"/>
+                </a:solidFill>
+              </a:rPr>
+              <a:t>•  ' OR '1'='1, la cadena resultante cambia la lógica de la consulta, porque sus comillas</a:t>
+            </a:r>
+          </a:p>
+          <a:p>
+            <a:pPr>
+              <a:spcAft>
+                <a:spcPts val="600"/>
+              </a:spcAft>
+            </a:pPr>
+            <a:r>
+              <a:rPr sz="1500">
+                <a:solidFill>
+                  <a:srgbClr val="22282E"/>
+                </a:solidFill>
+              </a:rPr>
+              <a:t>•  cierran el literal y su OR altera la condición. Toda la inyección —SQL, comandos, LDAP, la</a:t>
             </a:r>
           </a:p>
         </p:txBody>
@@ -4241,7 +4602,7 @@
                   <a:srgbClr val="0B3D2E"/>
                 </a:solidFill>
               </a:rPr>
-              <a:t>🧰 Herramientas y preparación</a:t>
+              <a:t>📖 Definiciones y características</a:t>
             </a:r>
           </a:p>
         </p:txBody>
@@ -4279,52 +4640,82 @@
                   <a:srgbClr val="22282E"/>
                 </a:solidFill>
               </a:rPr>
-              <a:t>•  DVWA (nivel Low y Medium) o Juice Shop.</a:t>
-            </a:r>
-          </a:p>
-          <a:p>
-            <a:pPr>
-              <a:spcAft>
-                <a:spcPts val="600"/>
-              </a:spcAft>
-            </a:pPr>
-            <a:r>
-              <a:rPr sz="1500">
-                <a:solidFill>
-                  <a:srgbClr val="22282E"/>
-                </a:solidFill>
-              </a:rPr>
-              <a:t>•  Burp Suite para interceptar y editar parámetros.</a:t>
-            </a:r>
-          </a:p>
-          <a:p>
-            <a:pPr>
-              <a:spcAft>
-                <a:spcPts val="600"/>
-              </a:spcAft>
-            </a:pPr>
-            <a:r>
-              <a:rPr sz="1500">
-                <a:solidFill>
-                  <a:srgbClr val="22282E"/>
-                </a:solidFill>
-              </a:rPr>
-              <a:t>•  Cliente SQL para inspeccionar la base de datos y comprobar tu progreso.</a:t>
-            </a:r>
-          </a:p>
-          <a:p>
-            <a:pPr>
-              <a:spcAft>
-                <a:spcPts val="600"/>
-              </a:spcAft>
-            </a:pPr>
-            <a:r>
-              <a:rPr sz="1500">
-                <a:solidFill>
-                  <a:srgbClr val="22282E"/>
-                </a:solidFill>
-              </a:rPr>
-              <a:t>•  docker run --rm -d -p 80:80 vulnerables/web-dvwa</a:t>
+              <a:t>•  Inyección SQL: inserción de sintaxis SQL en una entrada que se concatena a una consulta. Característica: rompe la separación entre datos y código.</a:t>
+            </a:r>
+          </a:p>
+          <a:p>
+            <a:pPr>
+              <a:spcAft>
+                <a:spcPts val="600"/>
+              </a:spcAft>
+            </a:pPr>
+            <a:r>
+              <a:rPr sz="1500">
+                <a:solidFill>
+                  <a:srgbClr val="22282E"/>
+                </a:solidFill>
+              </a:rPr>
+              <a:t>•  In-band SQLi: los resultados vuelven por el mismo canal (la respuesta). Característica: la variante más fácil de explotar.</a:t>
+            </a:r>
+          </a:p>
+          <a:p>
+            <a:pPr>
+              <a:spcAft>
+                <a:spcPts val="600"/>
+              </a:spcAft>
+            </a:pPr>
+            <a:r>
+              <a:rPr sz="1500">
+                <a:solidFill>
+                  <a:srgbClr val="22282E"/>
+                </a:solidFill>
+              </a:rPr>
+              <a:t>•  UNION-based: usa UNION SELECT para añadir filas controladas. Característica: requiere igualar número y tipo de columnas.</a:t>
+            </a:r>
+          </a:p>
+          <a:p>
+            <a:pPr>
+              <a:spcAft>
+                <a:spcPts val="600"/>
+              </a:spcAft>
+            </a:pPr>
+            <a:r>
+              <a:rPr sz="1500">
+                <a:solidFill>
+                  <a:srgbClr val="22282E"/>
+                </a:solidFill>
+              </a:rPr>
+              <a:t>•  Error-based: fuerza mensajes de error que filtran datos. Característica: depende de que la app muestre errores.</a:t>
+            </a:r>
+          </a:p>
+          <a:p>
+            <a:pPr>
+              <a:spcAft>
+                <a:spcPts val="600"/>
+              </a:spcAft>
+            </a:pPr>
+            <a:r>
+              <a:rPr sz="1500">
+                <a:solidFill>
+                  <a:srgbClr val="22282E"/>
+                </a:solidFill>
+              </a:rPr>
+              <a:t>•  Prepared statement: consulta con parámetros ligados. Característica: separa código de datos y elimina la SQLi.</a:t>
+            </a:r>
+          </a:p>
+          <a:p>
+            <a:pPr>
+              <a:spcAft>
+                <a:spcPts val="600"/>
+              </a:spcAft>
+            </a:pPr>
+            <a:r>
+              <a:rPr sz="1500">
+                <a:solidFill>
+                  <a:srgbClr val="22282E"/>
+                </a:solidFill>
+              </a:rPr>
+              <a:t>•  Comentario SQL (--, #, / /): trunca el resto de la query. Característica: clave para bypass de login.</a:t>
             </a:r>
           </a:p>
         </p:txBody>
@@ -4375,7 +4766,7 @@
                   <a:srgbClr val="0B3D2E"/>
                 </a:solidFill>
               </a:rPr>
-              <a:t>🧪 Laboratorio guiado</a:t>
+              <a:t>📔 Glosario</a:t>
             </a:r>
           </a:p>
         </p:txBody>
@@ -4413,97 +4804,97 @@
                   <a:srgbClr val="22282E"/>
                 </a:solidFill>
               </a:rPr>
-              <a:t>•  En DVWA → SQL Injection, introduce 1 y observa la consulta normal.</a:t>
-            </a:r>
-          </a:p>
-          <a:p>
-            <a:pPr>
-              <a:spcAft>
-                <a:spcPts val="600"/>
-              </a:spcAft>
-            </a:pPr>
-            <a:r>
-              <a:rPr sz="1500">
-                <a:solidFill>
-                  <a:srgbClr val="22282E"/>
-                </a:solidFill>
-              </a:rPr>
-              <a:t>•  Prueba 1' y busca un error SQL: confirma que el input llega crudo a la query.</a:t>
-            </a:r>
-          </a:p>
-          <a:p>
-            <a:pPr>
-              <a:spcAft>
-                <a:spcPts val="600"/>
-              </a:spcAft>
-            </a:pPr>
-            <a:r>
-              <a:rPr sz="1500">
-                <a:solidFill>
-                  <a:srgbClr val="22282E"/>
-                </a:solidFill>
-              </a:rPr>
-              <a:t>•  Determina el número de columnas con 1' ORDER BY 1-- -, ORDER BY 2-- -, hasta que falle.</a:t>
-            </a:r>
-          </a:p>
-          <a:p>
-            <a:pPr>
-              <a:spcAft>
-                <a:spcPts val="600"/>
-              </a:spcAft>
-            </a:pPr>
-            <a:r>
-              <a:rPr sz="1500">
-                <a:solidFill>
-                  <a:srgbClr val="22282E"/>
-                </a:solidFill>
-              </a:rPr>
-              <a:t>•  Extrae datos con UNION:</a:t>
-            </a:r>
-          </a:p>
-          <a:p>
-            <a:pPr>
-              <a:spcAft>
-                <a:spcPts val="600"/>
-              </a:spcAft>
-            </a:pPr>
-            <a:r>
-              <a:rPr sz="1500">
-                <a:solidFill>
-                  <a:srgbClr val="22282E"/>
-                </a:solidFill>
-              </a:rPr>
-              <a:t>•  1' UNION SELECT user, password FROM users-- -</a:t>
-            </a:r>
-          </a:p>
-          <a:p>
-            <a:pPr>
-              <a:spcAft>
-                <a:spcPts val="600"/>
-              </a:spcAft>
-            </a:pPr>
-            <a:r>
-              <a:rPr sz="1500">
-                <a:solidFill>
-                  <a:srgbClr val="22282E"/>
-                </a:solidFill>
-              </a:rPr>
-              <a:t>•  Enumera el esquema con informationschema:</a:t>
-            </a:r>
-          </a:p>
-          <a:p>
-            <a:pPr>
-              <a:spcAft>
-                <a:spcPts val="600"/>
-              </a:spcAft>
-            </a:pPr>
-            <a:r>
-              <a:rPr sz="1500">
-                <a:solidFill>
-                  <a:srgbClr val="22282E"/>
-                </a:solidFill>
-              </a:rPr>
-              <a:t>•  1' UNION SELECT tablename, NULL FROM informationschema.tables-- -</a:t>
+              <a:t>•  Término — Definición concisa</a:t>
+            </a:r>
+          </a:p>
+          <a:p>
+            <a:pPr>
+              <a:spcAft>
+                <a:spcPts val="600"/>
+              </a:spcAft>
+            </a:pPr>
+            <a:r>
+              <a:rPr sz="1500">
+                <a:solidFill>
+                  <a:srgbClr val="22282E"/>
+                </a:solidFill>
+              </a:rPr>
+              <a:t>•  Inyección SQL (SQLi) — Datos del usuario interpretados como parte de una consulta</a:t>
+            </a:r>
+          </a:p>
+          <a:p>
+            <a:pPr>
+              <a:spcAft>
+                <a:spcPts val="600"/>
+              </a:spcAft>
+            </a:pPr>
+            <a:r>
+              <a:rPr sz="1500">
+                <a:solidFill>
+                  <a:srgbClr val="22282E"/>
+                </a:solidFill>
+              </a:rPr>
+              <a:t>•  Concatenación — Construir la consulta pegando entrada con texto; la causa raíz</a:t>
+            </a:r>
+          </a:p>
+          <a:p>
+            <a:pPr>
+              <a:spcAft>
+                <a:spcPts val="600"/>
+              </a:spcAft>
+            </a:pPr>
+            <a:r>
+              <a:rPr sz="1500">
+                <a:solidFill>
+                  <a:srgbClr val="22282E"/>
+                </a:solidFill>
+              </a:rPr>
+              <a:t>•  Consulta parametrizada — Marcadores + datos aparte; la BD no interpreta el dato</a:t>
+            </a:r>
+          </a:p>
+          <a:p>
+            <a:pPr>
+              <a:spcAft>
+                <a:spcPts val="600"/>
+              </a:spcAft>
+            </a:pPr>
+            <a:r>
+              <a:rPr sz="1500">
+                <a:solidFill>
+                  <a:srgbClr val="22282E"/>
+                </a:solidFill>
+              </a:rPr>
+              <a:t>•  Prepared statement — Nombre técnico de la consulta parametrizada</a:t>
+            </a:r>
+          </a:p>
+          <a:p>
+            <a:pPr>
+              <a:spcAft>
+                <a:spcPts val="600"/>
+              </a:spcAft>
+            </a:pPr>
+            <a:r>
+              <a:rPr sz="1500">
+                <a:solidFill>
+                  <a:srgbClr val="22282E"/>
+                </a:solidFill>
+              </a:rPr>
+              <a:t>•  Blocklist — Filtrar caracteres prohibidos; siempre evadible</a:t>
+            </a:r>
+          </a:p>
+          <a:p>
+            <a:pPr>
+              <a:spcAft>
+                <a:spcPts val="600"/>
+              </a:spcAft>
+            </a:pPr>
+            <a:r>
+              <a:rPr sz="1500">
+                <a:solidFill>
+                  <a:srgbClr val="22282E"/>
+                </a:solidFill>
+              </a:rPr>
+              <a:t>•  Sonda con comilla — ' para provocar un error o cambio y detectar SQLi</a:t>
             </a:r>
           </a:p>
         </p:txBody>
@@ -4554,7 +4945,7 @@
                   <a:srgbClr val="0B3D2E"/>
                 </a:solidFill>
               </a:rPr>
-              <a:t>✍️ Ejercicios</a:t>
+              <a:t>🧰 Herramientas y preparación</a:t>
             </a:r>
           </a:p>
         </p:txBody>
@@ -4592,82 +4983,37 @@
                   <a:srgbClr val="22282E"/>
                 </a:solidFill>
               </a:rPr>
-              <a:t>•  Determina el motor de base de datos por su sintaxis de comentarios y errores.</a:t>
-            </a:r>
-          </a:p>
-          <a:p>
-            <a:pPr>
-              <a:spcAft>
-                <a:spcPts val="600"/>
-              </a:spcAft>
-            </a:pPr>
-            <a:r>
-              <a:rPr sz="1500">
-                <a:solidFill>
-                  <a:srgbClr val="22282E"/>
-                </a:solidFill>
-              </a:rPr>
-              <a:t>•  Extrae el hash de la contraseña de admin y crackéalo (offline, con hashcat) en tu lab.</a:t>
-            </a:r>
-          </a:p>
-          <a:p>
-            <a:pPr>
-              <a:spcAft>
-                <a:spcPts val="600"/>
-              </a:spcAft>
-            </a:pPr>
-            <a:r>
-              <a:rPr sz="1500">
-                <a:solidFill>
-                  <a:srgbClr val="22282E"/>
-                </a:solidFill>
-              </a:rPr>
-              <a:t>•  Consigue el nombre de la base de datos actual con database().</a:t>
-            </a:r>
-          </a:p>
-          <a:p>
-            <a:pPr>
-              <a:spcAft>
-                <a:spcPts val="600"/>
-              </a:spcAft>
-            </a:pPr>
-            <a:r>
-              <a:rPr sz="1500">
-                <a:solidFill>
-                  <a:srgbClr val="22282E"/>
-                </a:solidFill>
-              </a:rPr>
-              <a:t>•  Explica por qué ORDER BY ayuda a contar columnas.</a:t>
-            </a:r>
-          </a:p>
-          <a:p>
-            <a:pPr>
-              <a:spcAft>
-                <a:spcPts val="600"/>
-              </a:spcAft>
-            </a:pPr>
-            <a:r>
-              <a:rPr sz="1500">
-                <a:solidFill>
-                  <a:srgbClr val="22282E"/>
-                </a:solidFill>
-              </a:rPr>
-              <a:t>•  Escribe la versión parametrizada (segura) de la query vulnerable en PHP y en Python.</a:t>
-            </a:r>
-          </a:p>
-          <a:p>
-            <a:pPr>
-              <a:spcAft>
-                <a:spcPts val="600"/>
-              </a:spcAft>
-            </a:pPr>
-            <a:r>
-              <a:rPr sz="1500">
-                <a:solidFill>
-                  <a:srgbClr val="22282E"/>
-                </a:solidFill>
-              </a:rPr>
-              <a:t>•  Diferencia UNION-based de error-based con un ejemplo propio.</a:t>
+              <a:t>•  DVWA (nivel Low y Medium) o Juice Shop.</a:t>
+            </a:r>
+          </a:p>
+          <a:p>
+            <a:pPr>
+              <a:spcAft>
+                <a:spcPts val="600"/>
+              </a:spcAft>
+            </a:pPr>
+            <a:r>
+              <a:rPr sz="1500">
+                <a:solidFill>
+                  <a:srgbClr val="22282E"/>
+                </a:solidFill>
+              </a:rPr>
+              <a:t>•  Burp Suite para interceptar y editar parámetros.</a:t>
+            </a:r>
+          </a:p>
+          <a:p>
+            <a:pPr>
+              <a:spcAft>
+                <a:spcPts val="600"/>
+              </a:spcAft>
+            </a:pPr>
+            <a:r>
+              <a:rPr sz="1500">
+                <a:solidFill>
+                  <a:srgbClr val="22282E"/>
+                </a:solidFill>
+              </a:rPr>
+              <a:t>•  Cliente SQL para inspeccionar la base de datos y comprobar tu progreso.</a:t>
             </a:r>
           </a:p>
         </p:txBody>
@@ -4718,7 +5064,7 @@
                   <a:srgbClr val="0B3D2E"/>
                 </a:solidFill>
               </a:rPr>
-              <a:t>📝 Reto verificable</a:t>
+              <a:t>🧪 Laboratorio guiado</a:t>
             </a:r>
           </a:p>
         </p:txBody>
@@ -4756,22 +5102,97 @@
                   <a:srgbClr val="22282E"/>
                 </a:solidFill>
               </a:rPr>
-              <a:t>•  Extrae todos los usuarios y hashes de la tabla users de DVWA vía UNION SQLi y luego reescribe la consulta backend de forma segura.</a:t>
-            </a:r>
-          </a:p>
-          <a:p>
-            <a:pPr>
-              <a:spcAft>
-                <a:spcPts val="600"/>
-              </a:spcAft>
-            </a:pPr>
-            <a:r>
-              <a:rPr sz="1500">
-                <a:solidFill>
-                  <a:srgbClr val="22282E"/>
-                </a:solidFill>
-              </a:rPr>
-              <a:t>•  Criterio de aceptación: entregas el listado exfiltrado (evidencia), el payload UNION usado y el código corregido con prepared statements que impide la inyección.</a:t>
+              <a:t>•  En DVWA → SQL Injection, introduce 1 y observa la consulta normal.</a:t>
+            </a:r>
+          </a:p>
+          <a:p>
+            <a:pPr>
+              <a:spcAft>
+                <a:spcPts val="600"/>
+              </a:spcAft>
+            </a:pPr>
+            <a:r>
+              <a:rPr sz="1500">
+                <a:solidFill>
+                  <a:srgbClr val="22282E"/>
+                </a:solidFill>
+              </a:rPr>
+              <a:t>•  Prueba 1' y busca un error SQL: confirma que el input llega crudo a la query.</a:t>
+            </a:r>
+          </a:p>
+          <a:p>
+            <a:pPr>
+              <a:spcAft>
+                <a:spcPts val="600"/>
+              </a:spcAft>
+            </a:pPr>
+            <a:r>
+              <a:rPr sz="1500">
+                <a:solidFill>
+                  <a:srgbClr val="22282E"/>
+                </a:solidFill>
+              </a:rPr>
+              <a:t>•  Determina el número de columnas con 1' ORDER BY 1-- -, ORDER BY 2-- -, hasta que falle.</a:t>
+            </a:r>
+          </a:p>
+          <a:p>
+            <a:pPr>
+              <a:spcAft>
+                <a:spcPts val="600"/>
+              </a:spcAft>
+            </a:pPr>
+            <a:r>
+              <a:rPr sz="1500">
+                <a:solidFill>
+                  <a:srgbClr val="22282E"/>
+                </a:solidFill>
+              </a:rPr>
+              <a:t>•  Extrae datos con UNION:</a:t>
+            </a:r>
+          </a:p>
+          <a:p>
+            <a:pPr>
+              <a:spcAft>
+                <a:spcPts val="600"/>
+              </a:spcAft>
+            </a:pPr>
+            <a:r>
+              <a:rPr sz="1500">
+                <a:solidFill>
+                  <a:srgbClr val="22282E"/>
+                </a:solidFill>
+              </a:rPr>
+              <a:t>•  Enumera el esquema con informationschema:</a:t>
+            </a:r>
+          </a:p>
+          <a:p>
+            <a:pPr>
+              <a:spcAft>
+                <a:spcPts val="600"/>
+              </a:spcAft>
+            </a:pPr>
+            <a:r>
+              <a:rPr sz="1500">
+                <a:solidFill>
+                  <a:srgbClr val="22282E"/>
+                </a:solidFill>
+              </a:rPr>
+              <a:t>•  Prueba un bypass de login en el formulario de autenticación: admin'-- -.</a:t>
+            </a:r>
+          </a:p>
+          <a:p>
+            <a:pPr>
+              <a:spcAft>
+                <a:spcPts val="600"/>
+              </a:spcAft>
+            </a:pPr>
+            <a:r>
+              <a:rPr sz="1500">
+                <a:solidFill>
+                  <a:srgbClr val="22282E"/>
+                </a:solidFill>
+              </a:rPr>
+              <a:t>•  Documenta cada payload, la respuesta y el dato exfiltrado.</a:t>
             </a:r>
           </a:p>
         </p:txBody>
